--- a/IoMT_IDS_Presentation.pptx
+++ b/IoMT_IDS_Presentation.pptx
@@ -143,7 +143,7 @@
 <file path=ppt/revisionInfo.xml><?xml version="1.0" encoding="utf-8"?>
 <p1510:revInfo xmlns:a="http://schemas.openxmlformats.org/drawingml/2006/main" xmlns:r="http://schemas.openxmlformats.org/officeDocument/2006/relationships" xmlns:p1510="http://schemas.microsoft.com/office/powerpoint/2015/10/main">
   <p1510:revLst>
-    <p1510:client id="{14D8A4EF-6160-364B-9056-62E80023A26D}" v="48" dt="2026-03-22T16:45:41.115"/>
+    <p1510:client id="{14D8A4EF-6160-364B-9056-62E80023A26D}" v="57" dt="2026-03-22T19:05:50.759"/>
   </p1510:revLst>
 </p1510:revInfo>
 </file>
@@ -696,8 +696,65 @@
                 <a:ea typeface="+mn-ea"/>
                 <a:cs typeface="+mn-cs"/>
               </a:rPr>
-              <a:t>In this experiment, we evaluate the computational cost using CPU, since most IoT and edge devices do not have GPUs.</a:t>
-            </a:r>
+              <a:t>In this section, we evaluate the computational cost using CPU</a:t>
+            </a:r>
+            <a:r>
+              <a:rPr lang="zh-CN" altLang="en-US" sz="1200" kern="1200" dirty="0">
+                <a:solidFill>
+                  <a:schemeClr val="tx1"/>
+                </a:solidFill>
+                <a:effectLst/>
+                <a:latin typeface="+mn-lt"/>
+                <a:ea typeface="+mn-ea"/>
+                <a:cs typeface="+mn-cs"/>
+              </a:rPr>
+              <a:t> </a:t>
+            </a:r>
+            <a:r>
+              <a:rPr lang="en-US" altLang="zh-CN" sz="1200" kern="1200" dirty="0">
+                <a:solidFill>
+                  <a:schemeClr val="tx1"/>
+                </a:solidFill>
+                <a:effectLst/>
+                <a:latin typeface="+mn-lt"/>
+                <a:ea typeface="+mn-ea"/>
+                <a:cs typeface="+mn-cs"/>
+              </a:rPr>
+              <a:t>and</a:t>
+            </a:r>
+            <a:r>
+              <a:rPr lang="zh-CN" altLang="en-US" sz="1200" kern="1200" dirty="0">
+                <a:solidFill>
+                  <a:schemeClr val="tx1"/>
+                </a:solidFill>
+                <a:effectLst/>
+                <a:latin typeface="+mn-lt"/>
+                <a:ea typeface="+mn-ea"/>
+                <a:cs typeface="+mn-cs"/>
+              </a:rPr>
+              <a:t> </a:t>
+            </a:r>
+            <a:r>
+              <a:rPr lang="en-US" altLang="zh-CN" sz="1200" kern="1200" dirty="0">
+                <a:solidFill>
+                  <a:schemeClr val="tx1"/>
+                </a:solidFill>
+                <a:effectLst/>
+                <a:latin typeface="+mn-lt"/>
+                <a:ea typeface="+mn-ea"/>
+                <a:cs typeface="+mn-cs"/>
+              </a:rPr>
+              <a:t>memory.</a:t>
+            </a:r>
+            <a:endParaRPr lang="en-GB" sz="1200" kern="1200" dirty="0">
+              <a:solidFill>
+                <a:schemeClr val="tx1"/>
+              </a:solidFill>
+              <a:effectLst/>
+              <a:latin typeface="+mn-lt"/>
+              <a:ea typeface="+mn-ea"/>
+              <a:cs typeface="+mn-cs"/>
+            </a:endParaRPr>
           </a:p>
           <a:p>
             <a:br>
@@ -1013,7 +1070,31 @@
                 <a:ea typeface="+mn-ea"/>
                 <a:cs typeface="+mn-cs"/>
               </a:rPr>
-              <a:t>In this section, we evaluate the total latency of different methods. The latency is divided into three parts: encoding, network transmission, and inference.</a:t>
+              <a:t>In this section, we evaluate the total latency of different methods. The latency is divided into three parts: </a:t>
+            </a:r>
+            <a:r>
+              <a:rPr lang="en-GB" sz="1200" kern="1200">
+                <a:solidFill>
+                  <a:schemeClr val="tx1"/>
+                </a:solidFill>
+                <a:effectLst/>
+                <a:latin typeface="+mn-lt"/>
+                <a:ea typeface="+mn-ea"/>
+                <a:cs typeface="+mn-cs"/>
+              </a:rPr>
+              <a:t>feature extraction, </a:t>
+            </a:r>
+            <a:r>
+              <a:rPr lang="en-GB" sz="1200" kern="1200" dirty="0">
+                <a:solidFill>
+                  <a:schemeClr val="tx1"/>
+                </a:solidFill>
+                <a:effectLst/>
+                <a:latin typeface="+mn-lt"/>
+                <a:ea typeface="+mn-ea"/>
+                <a:cs typeface="+mn-cs"/>
+              </a:rPr>
+              <a:t>network transmission, and inference.</a:t>
             </a:r>
           </a:p>
           <a:p>
@@ -1157,7 +1238,7 @@
                 <a:ea typeface="+mn-ea"/>
                 <a:cs typeface="+mn-cs"/>
               </a:rPr>
-              <a:t>, the latency is significantly higher, reaching over 23,000 milliseconds. This is mainly because the encoding stage is very expensive.</a:t>
+              <a:t>, the latency is significantly higher, reaching over 37,000 nanoseconds. This is mainly because the feature extraction stage is very expensive.</a:t>
             </a:r>
           </a:p>
           <a:p>
@@ -2225,7 +2306,7 @@
                 <a:ea typeface="+mn-ea"/>
                 <a:cs typeface="+mn-cs"/>
               </a:rPr>
-              <a:t>In our implementation, we conduct experiments on an ARM platform to simulate a realistic edge environment. To ensure fairness and reflect real-world constraints, we do not use GPU acceleration or MPS, and all computations are performed on CPU.</a:t>
+              <a:t>In our implementation, we conduct experiments on an ARM platform to simulate a realistic edge environment. So, we do not use GPU acceleration or MPS, and all computations are performed on CPU.</a:t>
             </a:r>
           </a:p>
           <a:p>
@@ -2371,35 +2452,7 @@
                 <a:ea typeface="+mn-ea"/>
                 <a:cs typeface="+mn-cs"/>
               </a:rPr>
-              <a:t> </a:t>
-            </a:r>
-          </a:p>
-          <a:p>
-            <a:r>
-              <a:rPr lang="en-GB" sz="1200" kern="1200" dirty="0">
-                <a:solidFill>
-                  <a:schemeClr val="tx1"/>
-                </a:solidFill>
-                <a:effectLst/>
-                <a:latin typeface="+mn-lt"/>
-                <a:ea typeface="+mn-ea"/>
-                <a:cs typeface="+mn-cs"/>
-              </a:rPr>
-              <a:t>Finally, the classification results can be used to generate alerts or trigger defence strategies.</a:t>
-            </a:r>
-          </a:p>
-          <a:p>
-            <a:r>
-              <a:rPr lang="en-GB" sz="1200" kern="1200" dirty="0">
-                <a:solidFill>
-                  <a:schemeClr val="tx1"/>
-                </a:solidFill>
-                <a:effectLst/>
-                <a:latin typeface="+mn-lt"/>
-                <a:ea typeface="+mn-ea"/>
-                <a:cs typeface="+mn-cs"/>
-              </a:rPr>
-              <a:t> </a:t>
+              <a:t>  </a:t>
             </a:r>
           </a:p>
           <a:p>
@@ -2549,7 +2602,56 @@
                 <a:ea typeface="+mn-ea"/>
                 <a:cs typeface="+mn-cs"/>
               </a:rPr>
-              <a:t> dataset, which is a recent dataset designed for edge-based IoT environments(publish in 2022). It contains realistic network traffic and includes labelled data for both normal and attack behaviours, making it suitable for evaluating intrusion detection systems. In addition, the data is provided at the flow level, which aligns well with our system design and reduces computational complexity.</a:t>
+              <a:t> dataset, which is a recent dataset designed for edge-based IoT environments(publish in 2022). It contains realistic network traffic and includes labelled data for both normal and attack behaviours, making it suitable for evaluating intrusion detection systems. In addition, the data is provided at the flow level, which aligns well with our system design.</a:t>
+            </a:r>
+          </a:p>
+          <a:p>
+            <a:endParaRPr lang="en-GB" sz="1200" kern="1200" dirty="0">
+              <a:solidFill>
+                <a:schemeClr val="tx1"/>
+              </a:solidFill>
+              <a:effectLst/>
+              <a:latin typeface="+mn-lt"/>
+              <a:ea typeface="+mn-ea"/>
+              <a:cs typeface="+mn-cs"/>
+            </a:endParaRPr>
+          </a:p>
+          <a:p>
+            <a:r>
+              <a:rPr lang="en-GB" sz="1200" kern="1200" dirty="0">
+                <a:solidFill>
+                  <a:schemeClr val="tx1"/>
+                </a:solidFill>
+                <a:effectLst/>
+                <a:latin typeface="+mn-lt"/>
+                <a:ea typeface="+mn-ea"/>
+                <a:cs typeface="+mn-cs"/>
+              </a:rPr>
+              <a:t>For feature reduction, we investigate several approaches. First, we apply feature selection methods based on feature value ranges and their importance for prediction, in order to remove redundant or less informative features. Then, we use PCA and </a:t>
+            </a:r>
+            <a:r>
+              <a:rPr lang="en-GB" sz="1200" kern="1200" dirty="0" err="1">
+                <a:solidFill>
+                  <a:schemeClr val="tx1"/>
+                </a:solidFill>
+                <a:effectLst/>
+                <a:latin typeface="+mn-lt"/>
+                <a:ea typeface="+mn-ea"/>
+                <a:cs typeface="+mn-cs"/>
+              </a:rPr>
+              <a:t>AutoEncoder</a:t>
+            </a:r>
+            <a:r>
+              <a:rPr lang="en-GB" sz="1200" kern="1200" dirty="0">
+                <a:solidFill>
+                  <a:schemeClr val="tx1"/>
+                </a:solidFill>
+                <a:effectLst/>
+                <a:latin typeface="+mn-lt"/>
+                <a:ea typeface="+mn-ea"/>
+                <a:cs typeface="+mn-cs"/>
+              </a:rPr>
+              <a:t> as a traditional dimensionality reduction technique to project the data into a lower-dimensional space. Finally, we explore deep learning-based methods, including ResNeXt1D, and DNN to learn more complex feature representations.</a:t>
             </a:r>
           </a:p>
           <a:p>
@@ -2577,45 +2679,7 @@
                 <a:ea typeface="+mn-ea"/>
                 <a:cs typeface="+mn-cs"/>
               </a:rPr>
-              <a:t>For feature reduction, we investigate several approaches. First, we apply feature selection methods based on feature value ranges and their importance for prediction, in order to remove redundant or less informative features. Then, we use PCA as a traditional dimensionality reduction technique to project the data into a lower-dimensional space. Finally, we explore deep learning-based methods, including </a:t>
-            </a:r>
-            <a:r>
-              <a:rPr lang="en-GB" sz="1200" kern="1200" dirty="0" err="1">
-                <a:solidFill>
-                  <a:schemeClr val="tx1"/>
-                </a:solidFill>
-                <a:effectLst/>
-                <a:latin typeface="+mn-lt"/>
-                <a:ea typeface="+mn-ea"/>
-                <a:cs typeface="+mn-cs"/>
-              </a:rPr>
-              <a:t>AutoEncoder</a:t>
-            </a:r>
-            <a:r>
-              <a:rPr lang="en-GB" sz="1200" kern="1200" dirty="0">
-                <a:solidFill>
-                  <a:schemeClr val="tx1"/>
-                </a:solidFill>
-                <a:effectLst/>
-                <a:latin typeface="+mn-lt"/>
-                <a:ea typeface="+mn-ea"/>
-                <a:cs typeface="+mn-cs"/>
-              </a:rPr>
-              <a:t> and ResNeXt1D, to learn more complex feature representations.</a:t>
-            </a:r>
-          </a:p>
-          <a:p>
-            <a:r>
-              <a:rPr lang="en-GB" sz="1200" kern="1200" dirty="0">
-                <a:solidFill>
-                  <a:schemeClr val="tx1"/>
-                </a:solidFill>
-                <a:effectLst/>
-                <a:latin typeface="+mn-lt"/>
-                <a:ea typeface="+mn-ea"/>
-                <a:cs typeface="+mn-cs"/>
-              </a:rPr>
-              <a:t> </a:t>
+              <a:t>-------</a:t>
             </a:r>
           </a:p>
           <a:p>
@@ -2746,6 +2810,89 @@
             </a:r>
           </a:p>
           <a:p>
+            <a:endParaRPr lang="en-GB" sz="1200" kern="1200" dirty="0">
+              <a:solidFill>
+                <a:schemeClr val="tx1"/>
+              </a:solidFill>
+              <a:effectLst/>
+              <a:latin typeface="+mn-lt"/>
+              <a:ea typeface="+mn-ea"/>
+              <a:cs typeface="+mn-cs"/>
+            </a:endParaRPr>
+          </a:p>
+          <a:p>
+            <a:r>
+              <a:rPr lang="en-GB" sz="1200" kern="1200" dirty="0">
+                <a:solidFill>
+                  <a:schemeClr val="tx1"/>
+                </a:solidFill>
+                <a:effectLst/>
+                <a:latin typeface="+mn-lt"/>
+                <a:ea typeface="+mn-ea"/>
+                <a:cs typeface="+mn-cs"/>
+              </a:rPr>
+              <a:t>Since</a:t>
+            </a:r>
+            <a:r>
+              <a:rPr lang="zh-CN" altLang="en-US" sz="1200" kern="1200" dirty="0">
+                <a:solidFill>
+                  <a:schemeClr val="tx1"/>
+                </a:solidFill>
+                <a:effectLst/>
+                <a:latin typeface="+mn-lt"/>
+                <a:ea typeface="+mn-ea"/>
+                <a:cs typeface="+mn-cs"/>
+              </a:rPr>
+              <a:t> </a:t>
+            </a:r>
+            <a:r>
+              <a:rPr lang="en-US" altLang="zh-CN" sz="1200" kern="1200" dirty="0" err="1">
+                <a:solidFill>
+                  <a:schemeClr val="tx1"/>
+                </a:solidFill>
+                <a:effectLst/>
+                <a:latin typeface="+mn-lt"/>
+                <a:ea typeface="+mn-ea"/>
+                <a:cs typeface="+mn-cs"/>
+              </a:rPr>
+              <a:t>ResNeXt</a:t>
+            </a:r>
+            <a:r>
+              <a:rPr lang="en-US" altLang="zh-CN" sz="1200" kern="1200" dirty="0">
+                <a:solidFill>
+                  <a:schemeClr val="tx1"/>
+                </a:solidFill>
+                <a:effectLst/>
+                <a:latin typeface="+mn-lt"/>
+                <a:ea typeface="+mn-ea"/>
+                <a:cs typeface="+mn-cs"/>
+              </a:rPr>
+              <a:t> is</a:t>
+            </a:r>
+            <a:r>
+              <a:rPr lang="zh-CN" altLang="en-US" sz="1200" kern="1200" dirty="0">
+                <a:solidFill>
+                  <a:schemeClr val="tx1"/>
+                </a:solidFill>
+                <a:effectLst/>
+                <a:latin typeface="+mn-lt"/>
+                <a:ea typeface="+mn-ea"/>
+                <a:cs typeface="+mn-cs"/>
+              </a:rPr>
+              <a:t> </a:t>
+            </a:r>
+            <a:r>
+              <a:rPr lang="en-US" altLang="zh-CN" sz="1200" kern="1200" dirty="0">
+                <a:solidFill>
+                  <a:schemeClr val="tx1"/>
+                </a:solidFill>
+                <a:effectLst/>
+                <a:latin typeface="+mn-lt"/>
+                <a:ea typeface="+mn-ea"/>
+                <a:cs typeface="+mn-cs"/>
+              </a:rPr>
+              <a:t>not suitable for Flow-level data, </a:t>
+            </a:r>
             <a:br>
               <a:rPr lang="en-GB" sz="1200" kern="1200" dirty="0">
                 <a:solidFill>
@@ -2802,7 +2949,19 @@
                 <a:ea typeface="+mn-ea"/>
                 <a:cs typeface="+mn-cs"/>
               </a:rPr>
-              <a:t>, and max pooling. This step helps extract basic features and reduce the data size.</a:t>
+              <a:t>, and max pooling. This step helps extract basic features</a:t>
+            </a:r>
+            <a:r>
+              <a:rPr lang="en-US" altLang="zh-CN" sz="1200" kern="1200" dirty="0">
+                <a:solidFill>
+                  <a:schemeClr val="tx1"/>
+                </a:solidFill>
+                <a:effectLst/>
+                <a:latin typeface="+mn-lt"/>
+                <a:ea typeface="+mn-ea"/>
+                <a:cs typeface="+mn-cs"/>
+              </a:rPr>
+              <a:t>.</a:t>
             </a:r>
           </a:p>
           <a:p>
@@ -3402,10 +3561,8 @@
                 <a:ea typeface="+mn-ea"/>
                 <a:cs typeface="+mn-cs"/>
               </a:rPr>
-              <a:t>From the results, we can see that the DNN model consistently achieves the best performance, with accuracy and F1 score close to 99%. It is also very stable across different dimensions.</a:t>
-            </a:r>
-          </a:p>
-          <a:p>
+              <a:t>From the results, we can see that the DNN model consistently achieves the best performance, with accuracy and F1 score close to 99%.</a:t>
+            </a:r>
             <a:br>
               <a:rPr lang="en-GB" sz="1200" kern="1200" dirty="0">
                 <a:solidFill>
@@ -10801,10 +10958,10 @@
       </p:sp>
       <p:pic>
         <p:nvPicPr>
-          <p:cNvPr id="4" name="Picture 3">
+          <p:cNvPr id="5" name="Picture 4">
             <a:extLst>
               <a:ext uri="{FF2B5EF4-FFF2-40B4-BE49-F238E27FC236}">
-                <a16:creationId xmlns:a16="http://schemas.microsoft.com/office/drawing/2014/main" id="{C6ED9F84-2C79-606B-BACF-FA106E53E763}"/>
+                <a16:creationId xmlns:a16="http://schemas.microsoft.com/office/drawing/2014/main" id="{F9482D8A-8FEF-20EA-3794-BEF519BC433D}"/>
               </a:ext>
             </a:extLst>
           </p:cNvPr>
@@ -10821,8 +10978,8 @@
         </p:blipFill>
         <p:spPr>
           <a:xfrm>
-            <a:off x="685800" y="1422246"/>
-            <a:ext cx="7723682" cy="5381254"/>
+            <a:off x="1179576" y="1396588"/>
+            <a:ext cx="6784848" cy="4727148"/>
           </a:xfrm>
           <a:prstGeom prst="rect">
             <a:avLst/>
@@ -11382,7 +11539,7 @@
             </a:r>
             <a:r>
               <a:rPr lang="en-US" sz="1400" dirty="0"/>
-              <a:t>, can reduce the feature dimension by about 35% without significant loss in accuracy.</a:t>
+              <a:t>, can reduce the feature dimension by about 35% without significant loss in accuracy and F1 score.</a:t>
             </a:r>
           </a:p>
           <a:p>
@@ -11398,7 +11555,15 @@
             </a:pPr>
             <a:r>
               <a:rPr lang="en-US" sz="1400" dirty="0"/>
-              <a:t>For low-dimensional flow data, lightweight DNNs are more efficient and better suited for edge deployment than CNN-based models.</a:t>
+              <a:t>For low-dimensional flow data, lightweight DNNs are more efficient and better suited for edge deployment than </a:t>
+            </a:r>
+            <a:r>
+              <a:rPr lang="en-US" sz="1400" dirty="0" err="1"/>
+              <a:t>ResNeXt</a:t>
+            </a:r>
+            <a:r>
+              <a:rPr lang="en-US" sz="1400" dirty="0"/>
+              <a:t>.</a:t>
             </a:r>
           </a:p>
           <a:p>
@@ -47611,7 +47776,7 @@
             </a:pPr>
             <a:r>
               <a:rPr lang="en-GB" dirty="0"/>
-              <a:t>PCA (</a:t>
+              <a:t>PCA, Autoencoder (</a:t>
             </a:r>
             <a:r>
               <a:rPr lang="en-US" altLang="zh-CN" dirty="0"/>
@@ -47624,16 +47789,6 @@
             <a:r>
               <a:rPr lang="en-GB" dirty="0"/>
               <a:t>dimensionality reduction)</a:t>
-            </a:r>
-          </a:p>
-          <a:p>
-            <a:pPr marL="742950" lvl="1" indent="-285750">
-              <a:buFont typeface="Arial" panose="020B0604020202020204" pitchFamily="34" charset="0"/>
-              <a:buChar char="•"/>
-            </a:pPr>
-            <a:r>
-              <a:rPr lang="en-GB" dirty="0"/>
-              <a:t>Autoencoder</a:t>
             </a:r>
           </a:p>
           <a:p>
@@ -48011,7 +48166,15 @@
           <a:p>
             <a:r>
               <a:rPr lang="en-GB" dirty="0"/>
-              <a:t>   - Linear (36-&gt;64)</a:t>
+              <a:t>   - Linear (</a:t>
+            </a:r>
+            <a:r>
+              <a:rPr lang="en-GB" dirty="0" err="1"/>
+              <a:t>input_dim</a:t>
+            </a:r>
+            <a:r>
+              <a:rPr lang="en-GB" dirty="0"/>
+              <a:t>-&gt;64)</a:t>
             </a:r>
           </a:p>
           <a:p>

--- a/IoMT_IDS_Presentation.pptx
+++ b/IoMT_IDS_Presentation.pptx
@@ -143,7 +143,7 @@
 <file path=ppt/revisionInfo.xml><?xml version="1.0" encoding="utf-8"?>
 <p1510:revInfo xmlns:a="http://schemas.openxmlformats.org/drawingml/2006/main" xmlns:r="http://schemas.openxmlformats.org/officeDocument/2006/relationships" xmlns:p1510="http://schemas.microsoft.com/office/powerpoint/2015/10/main">
   <p1510:revLst>
-    <p1510:client id="{14D8A4EF-6160-364B-9056-62E80023A26D}" v="57" dt="2026-03-22T19:05:50.759"/>
+    <p1510:client id="{14D8A4EF-6160-364B-9056-62E80023A26D}" v="59" dt="2026-03-22T19:27:25.402"/>
   </p1510:revLst>
 </p1510:revInfo>
 </file>
@@ -1070,31 +1070,7 @@
                 <a:ea typeface="+mn-ea"/>
                 <a:cs typeface="+mn-cs"/>
               </a:rPr>
-              <a:t>In this section, we evaluate the total latency of different methods. The latency is divided into three parts: </a:t>
-            </a:r>
-            <a:r>
-              <a:rPr lang="en-GB" sz="1200" kern="1200">
-                <a:solidFill>
-                  <a:schemeClr val="tx1"/>
-                </a:solidFill>
-                <a:effectLst/>
-                <a:latin typeface="+mn-lt"/>
-                <a:ea typeface="+mn-ea"/>
-                <a:cs typeface="+mn-cs"/>
-              </a:rPr>
-              <a:t>feature extraction, </a:t>
-            </a:r>
-            <a:r>
-              <a:rPr lang="en-GB" sz="1200" kern="1200" dirty="0">
-                <a:solidFill>
-                  <a:schemeClr val="tx1"/>
-                </a:solidFill>
-                <a:effectLst/>
-                <a:latin typeface="+mn-lt"/>
-                <a:ea typeface="+mn-ea"/>
-                <a:cs typeface="+mn-cs"/>
-              </a:rPr>
-              <a:t>network transmission, and inference.</a:t>
+              <a:t>In this section, we evaluate the total latency of different methods. The latency is divided into three parts: feature extraction, network transmission, and inference.</a:t>
             </a:r>
           </a:p>
           <a:p>
@@ -13631,9 +13607,9 @@
           </p:nvGrpSpPr>
           <p:grpSpPr>
             <a:xfrm>
-              <a:off x="5593947" y="4034164"/>
+              <a:off x="5593947" y="4034165"/>
               <a:ext cx="5493834" cy="556548"/>
-              <a:chOff x="5858107" y="1405055"/>
+              <a:chOff x="5858107" y="1405056"/>
               <a:chExt cx="5493834" cy="556548"/>
             </a:xfrm>
           </p:grpSpPr>
@@ -13651,7 +13627,7 @@
             </p:nvSpPr>
             <p:spPr>
               <a:xfrm>
-                <a:off x="5858107" y="1405055"/>
+                <a:off x="5858107" y="1405056"/>
                 <a:ext cx="5493834" cy="556548"/>
               </a:xfrm>
               <a:prstGeom prst="roundRect">
@@ -13735,7 +13711,7 @@
             <p:spPr>
               <a:xfrm flipH="1">
                 <a:off x="7376160" y="1452100"/>
-                <a:ext cx="3751620" cy="445220"/>
+                <a:ext cx="3751620" cy="445219"/>
               </a:xfrm>
               <a:prstGeom prst="rect">
                 <a:avLst/>
@@ -14865,6 +14841,68 @@
               </a:rPr>
               <a:t>Conclusion and Future Work</a:t>
             </a:r>
+          </a:p>
+        </p:txBody>
+      </p:sp>
+      <p:sp>
+        <p:nvSpPr>
+          <p:cNvPr id="3" name="Rectangle 2">
+            <a:extLst>
+              <a:ext uri="{FF2B5EF4-FFF2-40B4-BE49-F238E27FC236}">
+                <a16:creationId xmlns:a16="http://schemas.microsoft.com/office/drawing/2014/main" id="{52F01B0C-A6E5-C60E-7F3C-E1AED201B54A}"/>
+              </a:ext>
+            </a:extLst>
+          </p:cNvPr>
+          <p:cNvSpPr/>
+          <p:nvPr/>
+        </p:nvSpPr>
+        <p:spPr>
+          <a:xfrm>
+            <a:off x="3950208" y="4623528"/>
+            <a:ext cx="5193792" cy="1045327"/>
+          </a:xfrm>
+          <a:prstGeom prst="rect">
+            <a:avLst/>
+          </a:prstGeom>
+          <a:solidFill>
+            <a:schemeClr val="bg1"/>
+          </a:solidFill>
+          <a:ln>
+            <a:noFill/>
+          </a:ln>
+          <a:effectLst>
+            <a:glow rad="127000">
+              <a:schemeClr val="accent1">
+                <a:alpha val="0"/>
+              </a:schemeClr>
+            </a:glow>
+            <a:outerShdw blurRad="40000" dist="23000" dir="5400000" rotWithShape="0">
+              <a:schemeClr val="bg1">
+                <a:alpha val="35000"/>
+              </a:schemeClr>
+            </a:outerShdw>
+          </a:effectLst>
+        </p:spPr>
+        <p:style>
+          <a:lnRef idx="1">
+            <a:schemeClr val="accent1"/>
+          </a:lnRef>
+          <a:fillRef idx="3">
+            <a:schemeClr val="accent1"/>
+          </a:fillRef>
+          <a:effectRef idx="2">
+            <a:schemeClr val="accent1"/>
+          </a:effectRef>
+          <a:fontRef idx="minor">
+            <a:schemeClr val="lt1"/>
+          </a:fontRef>
+        </p:style>
+        <p:txBody>
+          <a:bodyPr rtlCol="0" anchor="ctr"/>
+          <a:lstStyle/>
+          <a:p>
+            <a:pPr algn="ctr"/>
+            <a:endParaRPr lang="en-US"/>
           </a:p>
         </p:txBody>
       </p:sp>
@@ -47848,7 +47886,7 @@
 </file>
 
 <file path=ppt/slides/slide9.xml><?xml version="1.0" encoding="utf-8"?>
-<p:sld xmlns:a="http://schemas.openxmlformats.org/drawingml/2006/main" xmlns:r="http://schemas.openxmlformats.org/officeDocument/2006/relationships" xmlns:p="http://schemas.openxmlformats.org/presentationml/2006/main">
+<p:sld xmlns:a="http://schemas.openxmlformats.org/drawingml/2006/main" xmlns:r="http://schemas.openxmlformats.org/officeDocument/2006/relationships" xmlns:p="http://schemas.openxmlformats.org/presentationml/2006/main" show="0">
   <p:cSld>
     <p:spTree>
       <p:nvGrpSpPr>
